--- a/subat-cedes-pano.pptx
+++ b/subat-cedes-pano.pptx
@@ -6,7 +6,6 @@
   </p:sldMasterIdLst>
   <p:sldIdLst>
     <p:sldId id="256" r:id="rId2"/>
-    <p:sldId id="257" r:id="rId3"/>
     <p:sldId id="258" r:id="rId4"/>
     <p:sldId id="259" r:id="rId5"/>
     <p:sldId id="260" r:id="rId6"/>
@@ -548,94 +547,6 @@
 </p:notes>
 </file>
 
-<file path=ppt/notesSlides/notesSlide2.xml><?xml version="1.0" encoding="utf-8"?>
-<p:notes xmlns:a="http://schemas.openxmlformats.org/drawingml/2006/main" xmlns:r="http://schemas.openxmlformats.org/officeDocument/2006/relationships" xmlns:p="http://schemas.openxmlformats.org/presentationml/2006/main">
-  <p:cSld>
-    <p:spTree>
-      <p:nvGrpSpPr>
-        <p:cNvPr id="1" name=""/>
-        <p:cNvGrpSpPr/>
-        <p:nvPr/>
-      </p:nvGrpSpPr>
-      <p:grpSpPr>
-        <a:xfrm>
-          <a:off x="0" y="0"/>
-          <a:ext cx="0" cy="0"/>
-          <a:chOff x="0" y="0"/>
-          <a:chExt cx="0" cy="0"/>
-        </a:xfrm>
-      </p:grpSpPr>
-      <p:sp>
-        <p:nvSpPr>
-          <p:cNvPr id="2" name="Slide Image Placeholder 1"/>
-          <p:cNvSpPr>
-            <a:spLocks noGrp="1" noRot="1" noChangeAspect="1"/>
-          </p:cNvSpPr>
-          <p:nvPr>
-            <p:ph type="sldImg"/>
-          </p:nvPr>
-        </p:nvSpPr>
-        <p:spPr/>
-      </p:sp>
-      <p:sp>
-        <p:nvSpPr>
-          <p:cNvPr id="3" name="Notes Placeholder 2"/>
-          <p:cNvSpPr>
-            <a:spLocks noGrp="1"/>
-          </p:cNvSpPr>
-          <p:nvPr>
-            <p:ph type="body" idx="1"/>
-          </p:nvPr>
-        </p:nvSpPr>
-        <p:spPr/>
-        <p:txBody>
-          <a:bodyPr/>
-          <a:lstStyle/>
-          <a:p>
-            <a:r>
-              <a:rPr lang="en-US" dirty="0"/>
-              <a:t/>
-            </a:r>
-            <a:endParaRPr lang="en-US" dirty="0"/>
-          </a:p>
-        </p:txBody>
-      </p:sp>
-      <p:sp>
-        <p:nvSpPr>
-          <p:cNvPr id="4" name="Slide Number Placeholder 3"/>
-          <p:cNvSpPr>
-            <a:spLocks noGrp="1"/>
-          </p:cNvSpPr>
-          <p:nvPr>
-            <p:ph type="sldNum" sz="quarter" idx="10"/>
-          </p:nvPr>
-        </p:nvSpPr>
-        <p:spPr/>
-        <p:txBody>
-          <a:bodyPr/>
-          <a:lstStyle/>
-          <a:p>
-            <a:fld id="{F7021451-1387-4CA6-816F-3879F97B5CBC}" type="slidenum">
-              <a:rPr lang="en-US"/>
-              <a:t>2</a:t>
-            </a:fld>
-            <a:endParaRPr lang="en-US"/>
-          </a:p>
-        </p:txBody>
-      </p:sp>
-    </p:spTree>
-    <p:extLst>
-      <p:ext uri="{BB962C8B-B14F-4D97-AF65-F5344CB8AC3E}">
-        <p14:creationId xmlns:p14="http://schemas.microsoft.com/office/powerpoint/2010/main" val="1024086991"/>
-      </p:ext>
-    </p:extLst>
-  </p:cSld>
-  <p:clrMapOvr>
-    <a:masterClrMapping/>
-  </p:clrMapOvr>
-</p:notes>
-</file>
-
 <file path=ppt/notesSlides/notesSlide3.xml><?xml version="1.0" encoding="utf-8"?>
 <p:notes xmlns:a="http://schemas.openxmlformats.org/drawingml/2006/main" xmlns:r="http://schemas.openxmlformats.org/officeDocument/2006/relationships" xmlns:p="http://schemas.openxmlformats.org/presentationml/2006/main">
   <p:cSld>
@@ -1252,6 +1163,10 @@
           </a:solidFill>
           <a:ln/>
         </p:spPr>
+        <p:txBody>
+          <a:bodyPr/>
+          <a:p/>
+        </p:txBody>
       </p:sp>
       <p:sp>
         <p:nvSpPr>
@@ -1274,6 +1189,10 @@
           </a:solidFill>
           <a:ln/>
         </p:spPr>
+        <p:txBody>
+          <a:bodyPr/>
+          <a:p/>
+        </p:txBody>
       </p:sp>
       <p:sp>
         <p:nvSpPr>
@@ -1347,7 +1266,7 @@
                 <a:ea typeface="Calibri" pitchFamily="34" charset="-122"/>
                 <a:cs typeface="Calibri" pitchFamily="34" charset="-120"/>
               </a:rPr>
-              <a:t>ŞUBAT AYI  •  SEVGİ • DOSTLUK • MERHAMET</a:t>
+              <a:t>ŞUBAT AYI  •  YARDIMSEVERLİK • SABIR</a:t>
             </a:r>
             <a:endParaRPr lang="en-US" sz="2000" dirty="0"/>
           </a:p>
@@ -1383,7 +1302,7 @@
                   <a:srgbClr val="FFFFFF"/>
                 </a:solidFill>
               </a:rPr>
-              <a:t>2025 - 2026 Eğitim Öğretim Yılı</a:t>
+              <a:t>2026 - 2027 Eğitim Öğretim Yılı</a:t>
             </a:r>
             <a:endParaRPr lang="en-US" sz="1600" dirty="0"/>
           </a:p>
@@ -1399,7 +1318,7 @@
 
 <file path=ppt/slides/slide2.xml><?xml version="1.0" encoding="utf-8"?>
 <p:sld xmlns:a="http://schemas.openxmlformats.org/drawingml/2006/main" xmlns:r="http://schemas.openxmlformats.org/officeDocument/2006/relationships" xmlns:p="http://schemas.openxmlformats.org/presentationml/2006/main">
-  <p:cSld name="Slide 2">
+  <p:cSld name="Slide 3">
     <p:bg>
       <p:bgPr>
         <a:solidFill>
@@ -1436,10 +1355,14 @@
             <a:avLst/>
           </a:prstGeom>
           <a:solidFill>
-            <a:srgbClr val="990011"/>
+            <a:srgbClr val="2C5F2D"/>
           </a:solidFill>
           <a:ln/>
         </p:spPr>
+        <p:txBody>
+          <a:bodyPr/>
+          <a:p/>
+        </p:txBody>
       </p:sp>
       <p:sp>
         <p:nvSpPr>
@@ -1471,7 +1394,7 @@
                   <a:srgbClr val="000000"/>
                 </a:solidFill>
               </a:rPr>
-              <a:t>💗</a:t>
+              <a:t>🤲</a:t>
             </a:r>
             <a:endParaRPr lang="en-US" sz="8000" dirty="0"/>
           </a:p>
@@ -1510,7 +1433,7 @@
                 <a:ea typeface="Cambria" pitchFamily="34" charset="-122"/>
                 <a:cs typeface="Cambria" pitchFamily="34" charset="-120"/>
               </a:rPr>
-              <a:t>SEVGİ</a:t>
+              <a:t>YARDIMSEVERLİK</a:t>
             </a:r>
             <a:endParaRPr lang="en-US" sz="2600" dirty="0"/>
           </a:p>
@@ -1546,7 +1469,7 @@
                   <a:srgbClr val="FFFFFF"/>
                 </a:solidFill>
               </a:rPr>
-              <a:t>Koşulsuz Sevgiyi Anlamak</a:t>
+              <a:t>Elimizi Uzatmak</a:t>
             </a:r>
             <a:endParaRPr lang="en-US" sz="1500" dirty="0"/>
           </a:p>
@@ -1575,6 +1498,10 @@
           </a:solidFill>
           <a:ln/>
         </p:spPr>
+        <p:txBody>
+          <a:bodyPr/>
+          <a:p/>
+        </p:txBody>
       </p:sp>
       <p:sp>
         <p:nvSpPr>
@@ -1606,7 +1533,7 @@
                   <a:srgbClr val="2B2B2B"/>
                 </a:solidFill>
               </a:rPr>
-              <a:t>1. HAFTA</a:t>
+              <a:t>17 ve 18. HAFTA</a:t>
             </a:r>
             <a:endParaRPr lang="en-US" sz="1600" dirty="0"/>
           </a:p>
@@ -1620,7 +1547,7 @@
                   <a:srgbClr val="2B2B2B"/>
                 </a:solidFill>
               </a:rPr>
-              <a:t>02 - 06 Şubat</a:t>
+              <a:t>8 – 19 Şubat</a:t>
             </a:r>
             <a:endParaRPr lang="en-US" sz="1600" dirty="0"/>
           </a:p>
@@ -1653,13 +1580,13 @@
             <a:r>
               <a:rPr lang="en-US" sz="2200" b="1" i="1" dirty="0">
                 <a:solidFill>
-                  <a:srgbClr val="2F3C7E"/>
+                  <a:srgbClr val="1E2761"/>
                 </a:solidFill>
                 <a:latin typeface="Cambria" pitchFamily="34" charset="0"/>
                 <a:ea typeface="Cambria" pitchFamily="34" charset="-122"/>
                 <a:cs typeface="Cambria" pitchFamily="34" charset="-120"/>
               </a:rPr>
-              <a:t>"Sevgi, koşulsuz ve içtendir."</a:t>
+              <a:t>"Yardımseverlik, karşılık beklemeden elini uzatmaktır."</a:t>
             </a:r>
             <a:endParaRPr lang="en-US" sz="2200" dirty="0"/>
           </a:p>
@@ -1699,7 +1626,7 @@
                   <a:srgbClr val="2B2B2B"/>
                 </a:solidFill>
               </a:rPr>
-              <a:t>Sevgimizi sözle ve davranışla gösteririz.</a:t>
+              <a:t>İhtiyacı olana elimizden geldiğince yardım ederiz.</a:t>
             </a:r>
             <a:endParaRPr lang="en-US" sz="1700" dirty="0"/>
           </a:p>
@@ -1717,7 +1644,7 @@
                   <a:srgbClr val="2B2B2B"/>
                 </a:solidFill>
               </a:rPr>
-              <a:t>Sevgi, başarıya değil kalbe bakar.</a:t>
+              <a:t>Küçük bir yardım bile büyük mutluluk verir.</a:t>
             </a:r>
             <a:endParaRPr lang="en-US" sz="1700" dirty="0"/>
           </a:p>
@@ -1735,7 +1662,7 @@
                   <a:srgbClr val="2B2B2B"/>
                 </a:solidFill>
               </a:rPr>
-              <a:t>Aile, arkadaş, doğa... sevgi her yerdedir.</a:t>
+              <a:t>Yardım ederken karşılık beklemeyiz.</a:t>
             </a:r>
             <a:endParaRPr lang="en-US" sz="1700" dirty="0"/>
           </a:p>
@@ -1753,7 +1680,7 @@
                   <a:srgbClr val="2B2B2B"/>
                 </a:solidFill>
               </a:rPr>
-              <a:t>Küçük bir jest bile büyük sevgi taşır.</a:t>
+              <a:t>Birlikte olmak zorlukları kolaylaştırır.</a:t>
             </a:r>
             <a:endParaRPr lang="en-US" sz="1700" dirty="0"/>
           </a:p>
@@ -1806,10 +1733,14 @@
             <a:avLst/>
           </a:prstGeom>
           <a:solidFill>
-            <a:srgbClr val="990011"/>
+            <a:srgbClr val="1E2761"/>
           </a:solidFill>
           <a:ln/>
         </p:spPr>
+        <p:txBody>
+          <a:bodyPr/>
+          <a:p/>
+        </p:txBody>
       </p:sp>
       <p:sp>
         <p:nvSpPr>
@@ -1841,7 +1772,7 @@
                   <a:srgbClr val="000000"/>
                 </a:solidFill>
               </a:rPr>
-              <a:t>🤝</a:t>
+              <a:t>👟</a:t>
             </a:r>
             <a:endParaRPr lang="en-US" sz="8000" dirty="0"/>
           </a:p>
@@ -1880,7 +1811,7 @@
                 <a:ea typeface="Cambria" pitchFamily="34" charset="-122"/>
                 <a:cs typeface="Cambria" pitchFamily="34" charset="-120"/>
               </a:rPr>
-              <a:t>DOSTLUK</a:t>
+              <a:t>SABIR</a:t>
             </a:r>
             <a:endParaRPr lang="en-US" sz="2600" dirty="0"/>
           </a:p>
@@ -1916,7 +1847,7 @@
                   <a:srgbClr val="FFFFFF"/>
                 </a:solidFill>
               </a:rPr>
-              <a:t>Gerçek Bir Arkadaş Olmak</a:t>
+              <a:t>Zorluklar Karşısında Sakin Kalmak</a:t>
             </a:r>
             <a:endParaRPr lang="en-US" sz="1500" dirty="0"/>
           </a:p>
@@ -1945,6 +1876,10 @@
           </a:solidFill>
           <a:ln/>
         </p:spPr>
+        <p:txBody>
+          <a:bodyPr/>
+          <a:p/>
+        </p:txBody>
       </p:sp>
       <p:sp>
         <p:nvSpPr>
@@ -1976,7 +1911,7 @@
                   <a:srgbClr val="2B2B2B"/>
                 </a:solidFill>
               </a:rPr>
-              <a:t>2. HAFTA</a:t>
+              <a:t>19. HAFTA</a:t>
             </a:r>
             <a:endParaRPr lang="en-US" sz="1600" dirty="0"/>
           </a:p>
@@ -1990,7 +1925,7 @@
                   <a:srgbClr val="2B2B2B"/>
                 </a:solidFill>
               </a:rPr>
-              <a:t>09 - 13 Şubat</a:t>
+              <a:t>22 – 26 Şubat</a:t>
             </a:r>
             <a:endParaRPr lang="en-US" sz="1600" dirty="0"/>
           </a:p>
@@ -2023,13 +1958,13 @@
             <a:r>
               <a:rPr lang="en-US" sz="2200" b="1" i="1" dirty="0">
                 <a:solidFill>
-                  <a:srgbClr val="2F3C7E"/>
+                  <a:srgbClr val="1E2761"/>
                 </a:solidFill>
                 <a:latin typeface="Cambria" pitchFamily="34" charset="0"/>
                 <a:ea typeface="Cambria" pitchFamily="34" charset="-122"/>
                 <a:cs typeface="Cambria" pitchFamily="34" charset="-120"/>
               </a:rPr>
-              <a:t>"Dostluk, zor anda yanında olmaktır."</a:t>
+              <a:t>"Sabır, başarana kadar durmadan denemektir."</a:t>
             </a:r>
             <a:endParaRPr lang="en-US" sz="2200" dirty="0"/>
           </a:p>
@@ -2069,7 +2004,7 @@
                   <a:srgbClr val="2B2B2B"/>
                 </a:solidFill>
               </a:rPr>
-              <a:t>Arkadaşımızın yanında zor günde de oluruz.</a:t>
+              <a:t>Zorlandığımızda derin nefes alırız.</a:t>
             </a:r>
             <a:endParaRPr lang="en-US" sz="1700" dirty="0"/>
           </a:p>
@@ -2087,7 +2022,7 @@
                   <a:srgbClr val="2B2B2B"/>
                 </a:solidFill>
               </a:rPr>
-              <a:t>Alay etmeyiz, destek oluruz.</a:t>
+              <a:t>Hemen pes etmeyiz, tekrar deneriz.</a:t>
             </a:r>
             <a:endParaRPr lang="en-US" sz="1700" dirty="0"/>
           </a:p>
@@ -2105,7 +2040,7 @@
                   <a:srgbClr val="2B2B2B"/>
                 </a:solidFill>
               </a:rPr>
-              <a:t>Paylaşmak dostluğu güçlendirir.</a:t>
+              <a:t>Herkesin öğrenme hızı farklıdır.</a:t>
             </a:r>
             <a:endParaRPr lang="en-US" sz="1700" dirty="0"/>
           </a:p>
@@ -2123,7 +2058,7 @@
                   <a:srgbClr val="2B2B2B"/>
                 </a:solidFill>
               </a:rPr>
-              <a:t>Gerçek dost, doğruyu da söyleyebilendir.</a:t>
+              <a:t>Sabırlı olmak bizi güçlü kılar.</a:t>
             </a:r>
             <a:endParaRPr lang="en-US" sz="1700" dirty="0"/>
           </a:p>
@@ -2138,376 +2073,6 @@
 </file>
 
 <file path=ppt/slides/slide4.xml><?xml version="1.0" encoding="utf-8"?>
-<p:sld xmlns:a="http://schemas.openxmlformats.org/drawingml/2006/main" xmlns:r="http://schemas.openxmlformats.org/officeDocument/2006/relationships" xmlns:p="http://schemas.openxmlformats.org/presentationml/2006/main">
-  <p:cSld name="Slide 4">
-    <p:bg>
-      <p:bgPr>
-        <a:solidFill>
-          <a:srgbClr val="FFFFFF"/>
-        </a:solidFill>
-      </p:bgPr>
-    </p:bg>
-    <p:spTree>
-      <p:nvGrpSpPr>
-        <p:cNvPr id="1" name=""/>
-        <p:cNvGrpSpPr/>
-        <p:nvPr/>
-      </p:nvGrpSpPr>
-      <p:grpSpPr>
-        <a:xfrm>
-          <a:off x="0" y="0"/>
-          <a:ext cx="0" cy="0"/>
-          <a:chOff x="0" y="0"/>
-          <a:chExt cx="0" cy="0"/>
-        </a:xfrm>
-      </p:grpSpPr>
-      <p:sp>
-        <p:nvSpPr>
-          <p:cNvPr id="2" name="Shape 0"/>
-          <p:cNvSpPr/>
-          <p:nvPr/>
-        </p:nvSpPr>
-        <p:spPr>
-          <a:xfrm>
-            <a:off x="0" y="0"/>
-            <a:ext cx="3840480" cy="6858000"/>
-          </a:xfrm>
-          <a:prstGeom prst="rect">
-            <a:avLst/>
-          </a:prstGeom>
-          <a:solidFill>
-            <a:srgbClr val="990011"/>
-          </a:solidFill>
-          <a:ln/>
-        </p:spPr>
-      </p:sp>
-      <p:sp>
-        <p:nvSpPr>
-          <p:cNvPr id="3" name="Text 1"/>
-          <p:cNvSpPr/>
-          <p:nvPr/>
-        </p:nvSpPr>
-        <p:spPr>
-          <a:xfrm>
-            <a:off x="274320" y="457200"/>
-            <a:ext cx="3291840" cy="1645920"/>
-          </a:xfrm>
-          <a:prstGeom prst="rect">
-            <a:avLst/>
-          </a:prstGeom>
-          <a:noFill/>
-          <a:ln/>
-        </p:spPr>
-        <p:txBody>
-          <a:bodyPr wrap="square" rtlCol="0" anchor="ctr"/>
-          <a:lstStyle/>
-          <a:p>
-            <a:pPr algn="ctr" indent="0" marL="0">
-              <a:buNone/>
-            </a:pPr>
-            <a:r>
-              <a:rPr lang="en-US" sz="8000" dirty="0">
-                <a:solidFill>
-                  <a:srgbClr val="000000"/>
-                </a:solidFill>
-              </a:rPr>
-              <a:t>🐾</a:t>
-            </a:r>
-            <a:endParaRPr lang="en-US" sz="8000" dirty="0"/>
-          </a:p>
-        </p:txBody>
-      </p:sp>
-      <p:sp>
-        <p:nvSpPr>
-          <p:cNvPr id="4" name="Text 2"/>
-          <p:cNvSpPr/>
-          <p:nvPr/>
-        </p:nvSpPr>
-        <p:spPr>
-          <a:xfrm>
-            <a:off x="274320" y="2194560"/>
-            <a:ext cx="3291840" cy="914400"/>
-          </a:xfrm>
-          <a:prstGeom prst="rect">
-            <a:avLst/>
-          </a:prstGeom>
-          <a:noFill/>
-          <a:ln/>
-        </p:spPr>
-        <p:txBody>
-          <a:bodyPr wrap="square" rtlCol="0" anchor="ctr"/>
-          <a:lstStyle/>
-          <a:p>
-            <a:pPr algn="ctr" indent="0" marL="0">
-              <a:buNone/>
-            </a:pPr>
-            <a:r>
-              <a:rPr lang="en-US" sz="2600" b="1" dirty="0">
-                <a:solidFill>
-                  <a:srgbClr val="FFFFFF"/>
-                </a:solidFill>
-                <a:latin typeface="Cambria" pitchFamily="34" charset="0"/>
-                <a:ea typeface="Cambria" pitchFamily="34" charset="-122"/>
-                <a:cs typeface="Cambria" pitchFamily="34" charset="-120"/>
-              </a:rPr>
-              <a:t>MERHAMET</a:t>
-            </a:r>
-            <a:endParaRPr lang="en-US" sz="2600" dirty="0"/>
-          </a:p>
-        </p:txBody>
-      </p:sp>
-      <p:sp>
-        <p:nvSpPr>
-          <p:cNvPr id="5" name="Text 3"/>
-          <p:cNvSpPr/>
-          <p:nvPr/>
-        </p:nvSpPr>
-        <p:spPr>
-          <a:xfrm>
-            <a:off x="274320" y="3017520"/>
-            <a:ext cx="3291840" cy="1280160"/>
-          </a:xfrm>
-          <a:prstGeom prst="rect">
-            <a:avLst/>
-          </a:prstGeom>
-          <a:noFill/>
-          <a:ln/>
-        </p:spPr>
-        <p:txBody>
-          <a:bodyPr wrap="square" rtlCol="0" anchor="ctr"/>
-          <a:lstStyle/>
-          <a:p>
-            <a:pPr algn="ctr" indent="0" marL="0">
-              <a:buNone/>
-            </a:pPr>
-            <a:r>
-              <a:rPr lang="en-US" sz="1500" i="1" dirty="0">
-                <a:solidFill>
-                  <a:srgbClr val="FFFFFF"/>
-                </a:solidFill>
-              </a:rPr>
-              <a:t>Şefkat ve Yardımseverlik</a:t>
-            </a:r>
-            <a:endParaRPr lang="en-US" sz="1500" dirty="0"/>
-          </a:p>
-        </p:txBody>
-      </p:sp>
-      <p:sp>
-        <p:nvSpPr>
-          <p:cNvPr id="6" name="Shape 4"/>
-          <p:cNvSpPr/>
-          <p:nvPr/>
-        </p:nvSpPr>
-        <p:spPr>
-          <a:xfrm>
-            <a:off x="548640" y="4846320"/>
-            <a:ext cx="2743200" cy="1280160"/>
-          </a:xfrm>
-          <a:prstGeom prst="roundRect">
-            <a:avLst>
-              <a:gd name="adj" fmla="val 7143"/>
-            </a:avLst>
-          </a:prstGeom>
-          <a:solidFill>
-            <a:srgbClr val="FFFFFF">
-              <a:alpha val="85000"/>
-            </a:srgbClr>
-          </a:solidFill>
-          <a:ln/>
-        </p:spPr>
-      </p:sp>
-      <p:sp>
-        <p:nvSpPr>
-          <p:cNvPr id="7" name="Text 5"/>
-          <p:cNvSpPr/>
-          <p:nvPr/>
-        </p:nvSpPr>
-        <p:spPr>
-          <a:xfrm>
-            <a:off x="548640" y="4846320"/>
-            <a:ext cx="2743200" cy="1280160"/>
-          </a:xfrm>
-          <a:prstGeom prst="rect">
-            <a:avLst/>
-          </a:prstGeom>
-          <a:noFill/>
-          <a:ln/>
-        </p:spPr>
-        <p:txBody>
-          <a:bodyPr wrap="square" rtlCol="0" anchor="ctr"/>
-          <a:lstStyle/>
-          <a:p>
-            <a:pPr algn="ctr" indent="0" marL="0">
-              <a:buNone/>
-            </a:pPr>
-            <a:r>
-              <a:rPr lang="en-US" sz="1600" b="1" dirty="0">
-                <a:solidFill>
-                  <a:srgbClr val="2B2B2B"/>
-                </a:solidFill>
-              </a:rPr>
-              <a:t>3. HAFTA</a:t>
-            </a:r>
-            <a:endParaRPr lang="en-US" sz="1600" dirty="0"/>
-          </a:p>
-          <a:p>
-            <a:pPr algn="ctr" indent="0" marL="0">
-              <a:buNone/>
-            </a:pPr>
-            <a:r>
-              <a:rPr lang="en-US" sz="1600" b="1" dirty="0">
-                <a:solidFill>
-                  <a:srgbClr val="2B2B2B"/>
-                </a:solidFill>
-              </a:rPr>
-              <a:t>16 - 20 Şubat</a:t>
-            </a:r>
-            <a:endParaRPr lang="en-US" sz="1600" dirty="0"/>
-          </a:p>
-        </p:txBody>
-      </p:sp>
-      <p:sp>
-        <p:nvSpPr>
-          <p:cNvPr id="8" name="Text 6"/>
-          <p:cNvSpPr/>
-          <p:nvPr/>
-        </p:nvSpPr>
-        <p:spPr>
-          <a:xfrm>
-            <a:off x="4206240" y="457200"/>
-            <a:ext cx="7498080" cy="1188720"/>
-          </a:xfrm>
-          <a:prstGeom prst="rect">
-            <a:avLst/>
-          </a:prstGeom>
-          <a:noFill/>
-          <a:ln/>
-        </p:spPr>
-        <p:txBody>
-          <a:bodyPr wrap="square" rtlCol="0" anchor="ctr"/>
-          <a:lstStyle/>
-          <a:p>
-            <a:pPr indent="0" marL="0">
-              <a:buNone/>
-            </a:pPr>
-            <a:r>
-              <a:rPr lang="en-US" sz="2200" b="1" i="1" dirty="0">
-                <a:solidFill>
-                  <a:srgbClr val="2F3C7E"/>
-                </a:solidFill>
-                <a:latin typeface="Cambria" pitchFamily="34" charset="0"/>
-                <a:ea typeface="Cambria" pitchFamily="34" charset="-122"/>
-                <a:cs typeface="Cambria" pitchFamily="34" charset="-120"/>
-              </a:rPr>
-              <a:t>"Merhamet, çaresize uzanan şefkatli bir eldir."</a:t>
-            </a:r>
-            <a:endParaRPr lang="en-US" sz="2200" dirty="0"/>
-          </a:p>
-        </p:txBody>
-      </p:sp>
-      <p:sp>
-        <p:nvSpPr>
-          <p:cNvPr id="9" name="Text 7"/>
-          <p:cNvSpPr/>
-          <p:nvPr/>
-        </p:nvSpPr>
-        <p:spPr>
-          <a:xfrm>
-            <a:off x="4206240" y="1828800"/>
-            <a:ext cx="7498080" cy="4389120"/>
-          </a:xfrm>
-          <a:prstGeom prst="rect">
-            <a:avLst/>
-          </a:prstGeom>
-          <a:noFill/>
-          <a:ln/>
-        </p:spPr>
-        <p:txBody>
-          <a:bodyPr wrap="square" rtlCol="0" anchor="ctr"/>
-          <a:lstStyle/>
-          <a:p>
-            <a:pPr marL="342900" indent="-342900">
-              <a:spcAft>
-                <a:spcPts val="1200"/>
-              </a:spcAft>
-              <a:buSzPct val="100000"/>
-              <a:buChar char="•"/>
-            </a:pPr>
-            <a:r>
-              <a:rPr lang="en-US" sz="1700" dirty="0">
-                <a:solidFill>
-                  <a:srgbClr val="2B2B2B"/>
-                </a:solidFill>
-              </a:rPr>
-              <a:t>Zayıf ve çaresiz olana yardım ederiz.</a:t>
-            </a:r>
-            <a:endParaRPr lang="en-US" sz="1700" dirty="0"/>
-          </a:p>
-          <a:p>
-            <a:pPr marL="342900" indent="-342900">
-              <a:spcAft>
-                <a:spcPts val="1200"/>
-              </a:spcAft>
-              <a:buSzPct val="100000"/>
-              <a:buChar char="•"/>
-            </a:pPr>
-            <a:r>
-              <a:rPr lang="en-US" sz="1700" dirty="0">
-                <a:solidFill>
-                  <a:srgbClr val="2B2B2B"/>
-                </a:solidFill>
-              </a:rPr>
-              <a:t>Hayvanlara da şefkatle davranırız.</a:t>
-            </a:r>
-            <a:endParaRPr lang="en-US" sz="1700" dirty="0"/>
-          </a:p>
-          <a:p>
-            <a:pPr marL="342900" indent="-342900">
-              <a:spcAft>
-                <a:spcPts val="1200"/>
-              </a:spcAft>
-              <a:buSzPct val="100000"/>
-              <a:buChar char="•"/>
-            </a:pPr>
-            <a:r>
-              <a:rPr lang="en-US" sz="1700" dirty="0">
-                <a:solidFill>
-                  <a:srgbClr val="2B2B2B"/>
-                </a:solidFill>
-              </a:rPr>
-              <a:t>Küçük bir iyilik bile büyük fark yaratır.</a:t>
-            </a:r>
-            <a:endParaRPr lang="en-US" sz="1700" dirty="0"/>
-          </a:p>
-          <a:p>
-            <a:pPr marL="342900" indent="-342900">
-              <a:spcAft>
-                <a:spcPts val="1200"/>
-              </a:spcAft>
-              <a:buSzPct val="100000"/>
-              <a:buChar char="•"/>
-            </a:pPr>
-            <a:r>
-              <a:rPr lang="en-US" sz="1700" dirty="0">
-                <a:solidFill>
-                  <a:srgbClr val="2B2B2B"/>
-                </a:solidFill>
-              </a:rPr>
-              <a:t>Merhamet, kalbi büyüten bir değerdir.</a:t>
-            </a:r>
-            <a:endParaRPr lang="en-US" sz="1700" dirty="0"/>
-          </a:p>
-        </p:txBody>
-      </p:sp>
-    </p:spTree>
-  </p:cSld>
-  <p:clrMapOvr>
-    <a:masterClrMapping/>
-  </p:clrMapOvr>
-</p:sld>
-</file>
-
-<file path=ppt/slides/slide5.xml><?xml version="1.0" encoding="utf-8"?>
 <p:sld xmlns:a="http://schemas.openxmlformats.org/drawingml/2006/main" xmlns:r="http://schemas.openxmlformats.org/officeDocument/2006/relationships" xmlns:p="http://schemas.openxmlformats.org/presentationml/2006/main">
   <p:cSld name="Slide 5">
     <p:bg>
@@ -2600,7 +2165,7 @@
                   <a:srgbClr val="F9E795"/>
                 </a:solidFill>
               </a:rPr>
-              <a:t>SEVGİ • DOSTLUK • MERHAMET</a:t>
+              <a:t>YARDIMSEVERLİK • SABIR</a:t>
             </a:r>
             <a:endParaRPr lang="en-US" sz="2200" dirty="0"/>
           </a:p>
